--- a/2027/GEO330_Fall_Quarter/exercises/Exercise_01/scripts/slides/Exercise01_Template.pptx
+++ b/2027/GEO330_Fall_Quarter/exercises/Exercise_01/scripts/slides/Exercise01_Template.pptx
@@ -119,7 +119,7 @@
 <file path=ppt/revisionInfo.xml><?xml version="1.0" encoding="utf-8"?>
 <p1510:revInfo xmlns:a="http://schemas.openxmlformats.org/drawingml/2006/main" xmlns:r="http://schemas.openxmlformats.org/officeDocument/2006/relationships" xmlns:p1510="http://schemas.microsoft.com/office/powerpoint/2015/10/main">
   <p1510:revLst>
-    <p1510:client id="{CDA1F6B1-B43D-4F92-8722-D0598E1F7E95}" v="13" dt="2026-09-09T13:38:29.673"/>
+    <p1510:client id="{CDA1F6B1-B43D-4F92-8722-D0598E1F7E95}" v="17" dt="2026-09-11T20:24:23.057"/>
   </p1510:revLst>
 </p1510:revInfo>
 </file>
@@ -129,18 +129,18 @@
   <pc:docChgLst>
     <pc:chgData name="Christopher Smith" userId="f635bcaf-d701-437b-bffd-1a8f160c01d9" providerId="ADAL" clId="{321CF1EA-DDCA-4C73-9872-605BFFD8AB88}"/>
     <pc:docChg chg="undo custSel addSld delSld modSld">
-      <pc:chgData name="Christopher Smith" userId="f635bcaf-d701-437b-bffd-1a8f160c01d9" providerId="ADAL" clId="{321CF1EA-DDCA-4C73-9872-605BFFD8AB88}" dt="2026-09-09T13:40:46.399" v="1497" actId="1076"/>
+      <pc:chgData name="Christopher Smith" userId="f635bcaf-d701-437b-bffd-1a8f160c01d9" providerId="ADAL" clId="{321CF1EA-DDCA-4C73-9872-605BFFD8AB88}" dt="2026-09-11T20:44:36.029" v="1617" actId="1076"/>
       <pc:docMkLst>
         <pc:docMk/>
       </pc:docMkLst>
-      <pc:sldChg chg="modSp mod">
-        <pc:chgData name="Christopher Smith" userId="f635bcaf-d701-437b-bffd-1a8f160c01d9" providerId="ADAL" clId="{321CF1EA-DDCA-4C73-9872-605BFFD8AB88}" dt="2026-09-09T13:40:34.540" v="1496" actId="20577"/>
+      <pc:sldChg chg="addSp delSp modSp mod">
+        <pc:chgData name="Christopher Smith" userId="f635bcaf-d701-437b-bffd-1a8f160c01d9" providerId="ADAL" clId="{321CF1EA-DDCA-4C73-9872-605BFFD8AB88}" dt="2026-09-11T20:44:36.029" v="1617" actId="1076"/>
         <pc:sldMkLst>
           <pc:docMk/>
           <pc:sldMk cId="3196567083" sldId="258"/>
         </pc:sldMkLst>
-        <pc:spChg chg="mod">
-          <ac:chgData name="Christopher Smith" userId="f635bcaf-d701-437b-bffd-1a8f160c01d9" providerId="ADAL" clId="{321CF1EA-DDCA-4C73-9872-605BFFD8AB88}" dt="2026-09-09T13:38:48.268" v="1476" actId="20577"/>
+        <pc:spChg chg="del mod">
+          <ac:chgData name="Christopher Smith" userId="f635bcaf-d701-437b-bffd-1a8f160c01d9" providerId="ADAL" clId="{321CF1EA-DDCA-4C73-9872-605BFFD8AB88}" dt="2026-09-11T20:44:31.226" v="1615" actId="478"/>
           <ac:spMkLst>
             <pc:docMk/>
             <pc:sldMk cId="3196567083" sldId="258"/>
@@ -148,7 +148,7 @@
           </ac:spMkLst>
         </pc:spChg>
         <pc:spChg chg="mod">
-          <ac:chgData name="Christopher Smith" userId="f635bcaf-d701-437b-bffd-1a8f160c01d9" providerId="ADAL" clId="{321CF1EA-DDCA-4C73-9872-605BFFD8AB88}" dt="2026-09-09T13:34:48.237" v="1187" actId="20577"/>
+          <ac:chgData name="Christopher Smith" userId="f635bcaf-d701-437b-bffd-1a8f160c01d9" providerId="ADAL" clId="{321CF1EA-DDCA-4C73-9872-605BFFD8AB88}" dt="2026-09-11T20:20:35.782" v="1536" actId="20577"/>
           <ac:spMkLst>
             <pc:docMk/>
             <pc:sldMk cId="3196567083" sldId="258"/>
@@ -163,64 +163,23 @@
             <ac:spMk id="11" creationId="{3E48FC44-1FA2-4F7A-0A80-59B4E81301D5}"/>
           </ac:spMkLst>
         </pc:spChg>
-      </pc:sldChg>
-      <pc:sldChg chg="del">
-        <pc:chgData name="Christopher Smith" userId="f635bcaf-d701-437b-bffd-1a8f160c01d9" providerId="ADAL" clId="{321CF1EA-DDCA-4C73-9872-605BFFD8AB88}" dt="2026-09-08T02:22:26.724" v="8" actId="47"/>
-        <pc:sldMkLst>
-          <pc:docMk/>
-          <pc:sldMk cId="570994172" sldId="265"/>
-        </pc:sldMkLst>
-      </pc:sldChg>
-      <pc:sldChg chg="del">
-        <pc:chgData name="Christopher Smith" userId="f635bcaf-d701-437b-bffd-1a8f160c01d9" providerId="ADAL" clId="{321CF1EA-DDCA-4C73-9872-605BFFD8AB88}" dt="2026-09-08T02:27:22.568" v="214" actId="47"/>
-        <pc:sldMkLst>
-          <pc:docMk/>
-          <pc:sldMk cId="2783955809" sldId="267"/>
-        </pc:sldMkLst>
-      </pc:sldChg>
-      <pc:sldChg chg="del">
-        <pc:chgData name="Christopher Smith" userId="f635bcaf-d701-437b-bffd-1a8f160c01d9" providerId="ADAL" clId="{321CF1EA-DDCA-4C73-9872-605BFFD8AB88}" dt="2026-09-08T02:27:22.568" v="214" actId="47"/>
-        <pc:sldMkLst>
-          <pc:docMk/>
-          <pc:sldMk cId="3538999179" sldId="268"/>
-        </pc:sldMkLst>
-      </pc:sldChg>
-      <pc:sldChg chg="del">
-        <pc:chgData name="Christopher Smith" userId="f635bcaf-d701-437b-bffd-1a8f160c01d9" providerId="ADAL" clId="{321CF1EA-DDCA-4C73-9872-605BFFD8AB88}" dt="2026-09-08T02:27:22.568" v="214" actId="47"/>
-        <pc:sldMkLst>
-          <pc:docMk/>
-          <pc:sldMk cId="3185828549" sldId="269"/>
-        </pc:sldMkLst>
-      </pc:sldChg>
-      <pc:sldChg chg="del">
-        <pc:chgData name="Christopher Smith" userId="f635bcaf-d701-437b-bffd-1a8f160c01d9" providerId="ADAL" clId="{321CF1EA-DDCA-4C73-9872-605BFFD8AB88}" dt="2026-09-08T02:27:22.568" v="214" actId="47"/>
-        <pc:sldMkLst>
-          <pc:docMk/>
-          <pc:sldMk cId="252128979" sldId="270"/>
-        </pc:sldMkLst>
-      </pc:sldChg>
-      <pc:sldChg chg="del">
-        <pc:chgData name="Christopher Smith" userId="f635bcaf-d701-437b-bffd-1a8f160c01d9" providerId="ADAL" clId="{321CF1EA-DDCA-4C73-9872-605BFFD8AB88}" dt="2026-09-08T02:30:28.557" v="342" actId="47"/>
-        <pc:sldMkLst>
-          <pc:docMk/>
-          <pc:sldMk cId="3114417421" sldId="271"/>
-        </pc:sldMkLst>
-      </pc:sldChg>
-      <pc:sldChg chg="del">
-        <pc:chgData name="Christopher Smith" userId="f635bcaf-d701-437b-bffd-1a8f160c01d9" providerId="ADAL" clId="{321CF1EA-DDCA-4C73-9872-605BFFD8AB88}" dt="2026-09-08T02:27:25.390" v="215" actId="47"/>
-        <pc:sldMkLst>
-          <pc:docMk/>
-          <pc:sldMk cId="4250341618" sldId="272"/>
-        </pc:sldMkLst>
+        <pc:picChg chg="add mod">
+          <ac:chgData name="Christopher Smith" userId="f635bcaf-d701-437b-bffd-1a8f160c01d9" providerId="ADAL" clId="{321CF1EA-DDCA-4C73-9872-605BFFD8AB88}" dt="2026-09-11T20:44:36.029" v="1617" actId="1076"/>
+          <ac:picMkLst>
+            <pc:docMk/>
+            <pc:sldMk cId="3196567083" sldId="258"/>
+            <ac:picMk id="4" creationId="{A8A6836B-219D-B065-2232-9334EDFB143A}"/>
+          </ac:picMkLst>
+        </pc:picChg>
       </pc:sldChg>
       <pc:sldChg chg="modSp add mod">
-        <pc:chgData name="Christopher Smith" userId="f635bcaf-d701-437b-bffd-1a8f160c01d9" providerId="ADAL" clId="{321CF1EA-DDCA-4C73-9872-605BFFD8AB88}" dt="2026-09-09T13:40:46.399" v="1497" actId="1076"/>
+        <pc:chgData name="Christopher Smith" userId="f635bcaf-d701-437b-bffd-1a8f160c01d9" providerId="ADAL" clId="{321CF1EA-DDCA-4C73-9872-605BFFD8AB88}" dt="2026-09-11T20:20:42.798" v="1540" actId="20577"/>
         <pc:sldMkLst>
           <pc:docMk/>
           <pc:sldMk cId="4033029874" sldId="273"/>
         </pc:sldMkLst>
         <pc:spChg chg="mod">
-          <ac:chgData name="Christopher Smith" userId="f635bcaf-d701-437b-bffd-1a8f160c01d9" providerId="ADAL" clId="{321CF1EA-DDCA-4C73-9872-605BFFD8AB88}" dt="2026-09-08T02:36:40.673" v="820"/>
+          <ac:chgData name="Christopher Smith" userId="f635bcaf-d701-437b-bffd-1a8f160c01d9" providerId="ADAL" clId="{321CF1EA-DDCA-4C73-9872-605BFFD8AB88}" dt="2026-09-11T20:19:48.214" v="1520" actId="20577"/>
           <ac:spMkLst>
             <pc:docMk/>
             <pc:sldMk cId="4033029874" sldId="273"/>
@@ -228,7 +187,7 @@
           </ac:spMkLst>
         </pc:spChg>
         <pc:spChg chg="mod">
-          <ac:chgData name="Christopher Smith" userId="f635bcaf-d701-437b-bffd-1a8f160c01d9" providerId="ADAL" clId="{321CF1EA-DDCA-4C73-9872-605BFFD8AB88}" dt="2026-09-08T02:24:19.457" v="106" actId="20577"/>
+          <ac:chgData name="Christopher Smith" userId="f635bcaf-d701-437b-bffd-1a8f160c01d9" providerId="ADAL" clId="{321CF1EA-DDCA-4C73-9872-605BFFD8AB88}" dt="2026-09-11T20:20:42.798" v="1540" actId="20577"/>
           <ac:spMkLst>
             <pc:docMk/>
             <pc:sldMk cId="4033029874" sldId="273"/>
@@ -245,13 +204,13 @@
         </pc:spChg>
       </pc:sldChg>
       <pc:sldChg chg="modSp add mod">
-        <pc:chgData name="Christopher Smith" userId="f635bcaf-d701-437b-bffd-1a8f160c01d9" providerId="ADAL" clId="{321CF1EA-DDCA-4C73-9872-605BFFD8AB88}" dt="2026-09-08T22:17:51.562" v="1144" actId="20577"/>
+        <pc:chgData name="Christopher Smith" userId="f635bcaf-d701-437b-bffd-1a8f160c01d9" providerId="ADAL" clId="{321CF1EA-DDCA-4C73-9872-605BFFD8AB88}" dt="2026-09-11T20:20:32.230" v="1534" actId="20577"/>
         <pc:sldMkLst>
           <pc:docMk/>
           <pc:sldMk cId="1945915822" sldId="274"/>
         </pc:sldMkLst>
         <pc:spChg chg="mod">
-          <ac:chgData name="Christopher Smith" userId="f635bcaf-d701-437b-bffd-1a8f160c01d9" providerId="ADAL" clId="{321CF1EA-DDCA-4C73-9872-605BFFD8AB88}" dt="2026-09-08T02:36:47.933" v="824" actId="20577"/>
+          <ac:chgData name="Christopher Smith" userId="f635bcaf-d701-437b-bffd-1a8f160c01d9" providerId="ADAL" clId="{321CF1EA-DDCA-4C73-9872-605BFFD8AB88}" dt="2026-09-11T20:20:17.638" v="1532" actId="20577"/>
           <ac:spMkLst>
             <pc:docMk/>
             <pc:sldMk cId="1945915822" sldId="274"/>
@@ -259,7 +218,7 @@
           </ac:spMkLst>
         </pc:spChg>
         <pc:spChg chg="mod">
-          <ac:chgData name="Christopher Smith" userId="f635bcaf-d701-437b-bffd-1a8f160c01d9" providerId="ADAL" clId="{321CF1EA-DDCA-4C73-9872-605BFFD8AB88}" dt="2026-09-08T02:25:35.469" v="151" actId="20577"/>
+          <ac:chgData name="Christopher Smith" userId="f635bcaf-d701-437b-bffd-1a8f160c01d9" providerId="ADAL" clId="{321CF1EA-DDCA-4C73-9872-605BFFD8AB88}" dt="2026-09-11T20:20:32.230" v="1534" actId="20577"/>
           <ac:spMkLst>
             <pc:docMk/>
             <pc:sldMk cId="1945915822" sldId="274"/>
@@ -284,13 +243,13 @@
         </pc:spChg>
       </pc:sldChg>
       <pc:sldChg chg="delSp modSp add mod">
-        <pc:chgData name="Christopher Smith" userId="f635bcaf-d701-437b-bffd-1a8f160c01d9" providerId="ADAL" clId="{321CF1EA-DDCA-4C73-9872-605BFFD8AB88}" dt="2026-09-08T22:18:41.321" v="1159" actId="20577"/>
+        <pc:chgData name="Christopher Smith" userId="f635bcaf-d701-437b-bffd-1a8f160c01d9" providerId="ADAL" clId="{321CF1EA-DDCA-4C73-9872-605BFFD8AB88}" dt="2026-09-11T20:21:32.510" v="1612" actId="20577"/>
         <pc:sldMkLst>
           <pc:docMk/>
           <pc:sldMk cId="3803463582" sldId="275"/>
         </pc:sldMkLst>
         <pc:spChg chg="mod">
-          <ac:chgData name="Christopher Smith" userId="f635bcaf-d701-437b-bffd-1a8f160c01d9" providerId="ADAL" clId="{321CF1EA-DDCA-4C73-9872-605BFFD8AB88}" dt="2026-09-08T22:17:36.653" v="1137" actId="20577"/>
+          <ac:chgData name="Christopher Smith" userId="f635bcaf-d701-437b-bffd-1a8f160c01d9" providerId="ADAL" clId="{321CF1EA-DDCA-4C73-9872-605BFFD8AB88}" dt="2026-09-11T20:21:32.510" v="1612" actId="20577"/>
           <ac:spMkLst>
             <pc:docMk/>
             <pc:sldMk cId="3803463582" sldId="275"/>
@@ -313,17 +272,9 @@
             <ac:spMk id="11" creationId="{37D97EBE-2CC4-2AEF-5E63-2C1BEB89A7B9}"/>
           </ac:spMkLst>
         </pc:spChg>
-        <pc:spChg chg="del">
-          <ac:chgData name="Christopher Smith" userId="f635bcaf-d701-437b-bffd-1a8f160c01d9" providerId="ADAL" clId="{321CF1EA-DDCA-4C73-9872-605BFFD8AB88}" dt="2026-09-08T22:17:39.829" v="1138" actId="478"/>
-          <ac:spMkLst>
-            <pc:docMk/>
-            <pc:sldMk cId="3803463582" sldId="275"/>
-            <ac:spMk id="12" creationId="{A1B47200-A8D0-F68B-2CA0-D4757846FB08}"/>
-          </ac:spMkLst>
-        </pc:spChg>
       </pc:sldChg>
       <pc:sldChg chg="addSp delSp modSp add mod">
-        <pc:chgData name="Christopher Smith" userId="f635bcaf-d701-437b-bffd-1a8f160c01d9" providerId="ADAL" clId="{321CF1EA-DDCA-4C73-9872-605BFFD8AB88}" dt="2026-09-09T13:38:18.986" v="1445" actId="20577"/>
+        <pc:chgData name="Christopher Smith" userId="f635bcaf-d701-437b-bffd-1a8f160c01d9" providerId="ADAL" clId="{321CF1EA-DDCA-4C73-9872-605BFFD8AB88}" dt="2026-09-11T20:20:39.133" v="1538" actId="20577"/>
         <pc:sldMkLst>
           <pc:docMk/>
           <pc:sldMk cId="72989767" sldId="276"/>
@@ -345,21 +296,20 @@
           </ac:spMkLst>
         </pc:spChg>
         <pc:spChg chg="mod">
-          <ac:chgData name="Christopher Smith" userId="f635bcaf-d701-437b-bffd-1a8f160c01d9" providerId="ADAL" clId="{321CF1EA-DDCA-4C73-9872-605BFFD8AB88}" dt="2026-09-09T13:34:42.820" v="1185" actId="20577"/>
+          <ac:chgData name="Christopher Smith" userId="f635bcaf-d701-437b-bffd-1a8f160c01d9" providerId="ADAL" clId="{321CF1EA-DDCA-4C73-9872-605BFFD8AB88}" dt="2026-09-11T20:20:39.133" v="1538" actId="20577"/>
           <ac:spMkLst>
             <pc:docMk/>
             <pc:sldMk cId="72989767" sldId="276"/>
             <ac:spMk id="6" creationId="{2A0E8101-6FD3-9312-509E-3ACCFF9CD6B5}"/>
           </ac:spMkLst>
         </pc:spChg>
-        <pc:spChg chg="del mod">
-          <ac:chgData name="Christopher Smith" userId="f635bcaf-d701-437b-bffd-1a8f160c01d9" providerId="ADAL" clId="{321CF1EA-DDCA-4C73-9872-605BFFD8AB88}" dt="2026-09-08T22:13:42.563" v="897" actId="478"/>
-          <ac:spMkLst>
-            <pc:docMk/>
-            <pc:sldMk cId="72989767" sldId="276"/>
-            <ac:spMk id="11" creationId="{C1E40558-41DA-DEC9-FB85-028CD1394E20}"/>
-          </ac:spMkLst>
-        </pc:spChg>
+      </pc:sldChg>
+      <pc:sldChg chg="add del">
+        <pc:chgData name="Christopher Smith" userId="f635bcaf-d701-437b-bffd-1a8f160c01d9" providerId="ADAL" clId="{321CF1EA-DDCA-4C73-9872-605BFFD8AB88}" dt="2026-09-11T20:24:23.045" v="1614"/>
+        <pc:sldMkLst>
+          <pc:docMk/>
+          <pc:sldMk cId="2226035184" sldId="277"/>
+        </pc:sldMkLst>
       </pc:sldChg>
     </pc:docChg>
   </pc:docChgLst>
@@ -517,7 +467,7 @@
           <a:p>
             <a:fld id="{2F3E8B1C-86EF-43CF-8304-249481088644}" type="datetimeFigureOut">
               <a:rPr lang="en-US" smtClean="0"/>
-              <a:t>9/9/2026</a:t>
+              <a:t>9/11/2026</a:t>
             </a:fld>
             <a:endParaRPr lang="en-US"/>
           </a:p>
@@ -715,7 +665,7 @@
           <a:p>
             <a:fld id="{2F3E8B1C-86EF-43CF-8304-249481088644}" type="datetimeFigureOut">
               <a:rPr lang="en-US" smtClean="0"/>
-              <a:t>9/9/2026</a:t>
+              <a:t>9/11/2026</a:t>
             </a:fld>
             <a:endParaRPr lang="en-US"/>
           </a:p>
@@ -923,7 +873,7 @@
           <a:p>
             <a:fld id="{2F3E8B1C-86EF-43CF-8304-249481088644}" type="datetimeFigureOut">
               <a:rPr lang="en-US" smtClean="0"/>
-              <a:t>9/9/2026</a:t>
+              <a:t>9/11/2026</a:t>
             </a:fld>
             <a:endParaRPr lang="en-US"/>
           </a:p>
@@ -1121,7 +1071,7 @@
           <a:p>
             <a:fld id="{2F3E8B1C-86EF-43CF-8304-249481088644}" type="datetimeFigureOut">
               <a:rPr lang="en-US" smtClean="0"/>
-              <a:t>9/9/2026</a:t>
+              <a:t>9/11/2026</a:t>
             </a:fld>
             <a:endParaRPr lang="en-US"/>
           </a:p>
@@ -1396,7 +1346,7 @@
           <a:p>
             <a:fld id="{2F3E8B1C-86EF-43CF-8304-249481088644}" type="datetimeFigureOut">
               <a:rPr lang="en-US" smtClean="0"/>
-              <a:t>9/9/2026</a:t>
+              <a:t>9/11/2026</a:t>
             </a:fld>
             <a:endParaRPr lang="en-US"/>
           </a:p>
@@ -1666,7 +1616,7 @@
           <a:p>
             <a:fld id="{2F3E8B1C-86EF-43CF-8304-249481088644}" type="datetimeFigureOut">
               <a:rPr lang="en-US" smtClean="0"/>
-              <a:t>9/9/2026</a:t>
+              <a:t>9/11/2026</a:t>
             </a:fld>
             <a:endParaRPr lang="en-US"/>
           </a:p>
@@ -2086,7 +2036,7 @@
           <a:p>
             <a:fld id="{2F3E8B1C-86EF-43CF-8304-249481088644}" type="datetimeFigureOut">
               <a:rPr lang="en-US" smtClean="0"/>
-              <a:t>9/9/2026</a:t>
+              <a:t>9/11/2026</a:t>
             </a:fld>
             <a:endParaRPr lang="en-US"/>
           </a:p>
@@ -2227,7 +2177,7 @@
           <a:p>
             <a:fld id="{2F3E8B1C-86EF-43CF-8304-249481088644}" type="datetimeFigureOut">
               <a:rPr lang="en-US" smtClean="0"/>
-              <a:t>9/9/2026</a:t>
+              <a:t>9/11/2026</a:t>
             </a:fld>
             <a:endParaRPr lang="en-US"/>
           </a:p>
@@ -2340,7 +2290,7 @@
           <a:p>
             <a:fld id="{2F3E8B1C-86EF-43CF-8304-249481088644}" type="datetimeFigureOut">
               <a:rPr lang="en-US" smtClean="0"/>
-              <a:t>9/9/2026</a:t>
+              <a:t>9/11/2026</a:t>
             </a:fld>
             <a:endParaRPr lang="en-US"/>
           </a:p>
@@ -2651,7 +2601,7 @@
           <a:p>
             <a:fld id="{2F3E8B1C-86EF-43CF-8304-249481088644}" type="datetimeFigureOut">
               <a:rPr lang="en-US" smtClean="0"/>
-              <a:t>9/9/2026</a:t>
+              <a:t>9/11/2026</a:t>
             </a:fld>
             <a:endParaRPr lang="en-US"/>
           </a:p>
@@ -2939,7 +2889,7 @@
           <a:p>
             <a:fld id="{2F3E8B1C-86EF-43CF-8304-249481088644}" type="datetimeFigureOut">
               <a:rPr lang="en-US" smtClean="0"/>
-              <a:t>9/9/2026</a:t>
+              <a:t>9/11/2026</a:t>
             </a:fld>
             <a:endParaRPr lang="en-US"/>
           </a:p>
@@ -3180,7 +3130,7 @@
             <a:fld id="{2F3E8B1C-86EF-43CF-8304-249481088644}" type="datetimeFigureOut">
               <a:rPr lang="en-US" smtClean="0"/>
               <a:pPr/>
-              <a:t>9/9/2026</a:t>
+              <a:t>9/11/2026</a:t>
             </a:fld>
             <a:endParaRPr lang="en-US" dirty="0"/>
           </a:p>
@@ -3730,7 +3680,7 @@
             </a:br>
             <a:r>
               <a:rPr lang="en-US" sz="3400" dirty="0"/>
-              <a:t>2010-2025</a:t>
+              <a:t>2010-2024</a:t>
             </a:r>
           </a:p>
         </p:txBody>
@@ -3824,62 +3774,36 @@
           </a:p>
         </p:txBody>
       </p:sp>
-      <p:sp>
-        <p:nvSpPr>
-          <p:cNvPr id="3" name="Rectangle: Rounded Corners 2">
-            <a:extLst>
-              <a:ext uri="{FF2B5EF4-FFF2-40B4-BE49-F238E27FC236}">
-                <a16:creationId xmlns:a16="http://schemas.microsoft.com/office/drawing/2014/main" id="{ED507706-6F42-E11B-D908-0EABC71B74DF}"/>
-              </a:ext>
-            </a:extLst>
-          </p:cNvPr>
-          <p:cNvSpPr/>
+      <p:pic>
+        <p:nvPicPr>
+          <p:cNvPr id="4" name="Picture 3">
+            <a:extLst>
+              <a:ext uri="{FF2B5EF4-FFF2-40B4-BE49-F238E27FC236}">
+                <a16:creationId xmlns:a16="http://schemas.microsoft.com/office/drawing/2014/main" id="{A8A6836B-219D-B065-2232-9334EDFB143A}"/>
+              </a:ext>
+            </a:extLst>
+          </p:cNvPr>
+          <p:cNvPicPr>
+            <a:picLocks noChangeAspect="1"/>
+          </p:cNvPicPr>
           <p:nvPr/>
-        </p:nvSpPr>
+        </p:nvPicPr>
+        <p:blipFill>
+          <a:blip r:embed="rId2"/>
+          <a:stretch>
+            <a:fillRect/>
+          </a:stretch>
+        </p:blipFill>
         <p:spPr>
           <a:xfrm>
-            <a:off x="6735536" y="1698171"/>
-            <a:ext cx="4302578" cy="3788229"/>
+            <a:off x="7058553" y="781050"/>
+            <a:ext cx="4210050" cy="5295900"/>
           </a:xfrm>
-          <a:prstGeom prst="roundRect">
+          <a:prstGeom prst="rect">
             <a:avLst/>
           </a:prstGeom>
         </p:spPr>
-        <p:style>
-          <a:lnRef idx="2">
-            <a:schemeClr val="accent1">
-              <a:shade val="15000"/>
-            </a:schemeClr>
-          </a:lnRef>
-          <a:fillRef idx="1">
-            <a:schemeClr val="accent1"/>
-          </a:fillRef>
-          <a:effectRef idx="0">
-            <a:schemeClr val="accent1"/>
-          </a:effectRef>
-          <a:fontRef idx="minor">
-            <a:schemeClr val="lt1"/>
-          </a:fontRef>
-        </p:style>
-        <p:txBody>
-          <a:bodyPr rtlCol="0" anchor="ctr"/>
-          <a:lstStyle/>
-          <a:p>
-            <a:pPr algn="ctr"/>
-            <a:r>
-              <a:rPr lang="en-US" dirty="0"/>
-              <a:t>Insert national mode share trends plot</a:t>
-            </a:r>
-            <a:br>
-              <a:rPr lang="en-US" dirty="0"/>
-            </a:br>
-            <a:r>
-              <a:rPr lang="en-US" dirty="0"/>
-              <a:t>available in step #3 of exercise.</a:t>
-            </a:r>
-          </a:p>
-        </p:txBody>
-      </p:sp>
+      </p:pic>
     </p:spTree>
     <p:extLst>
       <p:ext uri="{BB962C8B-B14F-4D97-AF65-F5344CB8AC3E}">
@@ -3965,7 +3889,7 @@
             </a:br>
             <a:r>
               <a:rPr lang="en-US" sz="3400" dirty="0"/>
-              <a:t>2010-2025</a:t>
+              <a:t>2010-2024</a:t>
             </a:r>
           </a:p>
         </p:txBody>
@@ -4212,7 +4136,7 @@
             </a:br>
             <a:r>
               <a:rPr lang="en-US" sz="3400" dirty="0"/>
-              <a:t>2010-2025</a:t>
+              <a:t>2010-2024</a:t>
             </a:r>
           </a:p>
         </p:txBody>
@@ -4338,7 +4262,14 @@
             <a:pPr algn="ctr"/>
             <a:r>
               <a:rPr lang="en-US" dirty="0"/>
-              <a:t>Insert chart copied from RStudio</a:t>
+              <a:t>Insert custom pedestrian fatalities trends plot for your county </a:t>
+            </a:r>
+            <a:br>
+              <a:rPr lang="en-US" dirty="0"/>
+            </a:br>
+            <a:r>
+              <a:rPr lang="en-US" dirty="0"/>
+              <a:t>created in step #4 of exercise.</a:t>
             </a:r>
           </a:p>
         </p:txBody>
@@ -4428,7 +4359,7 @@
             </a:br>
             <a:r>
               <a:rPr lang="en-US" sz="3400" dirty="0"/>
-              <a:t>2025</a:t>
+              <a:t>2024</a:t>
             </a:r>
           </a:p>
         </p:txBody>
@@ -4557,7 +4488,14 @@
             <a:pPr algn="ctr"/>
             <a:r>
               <a:rPr lang="en-US" dirty="0"/>
-              <a:t>Insert map copied from RStudio</a:t>
+              <a:t>Insert custom pedestrian fatalities hot spot map for your county </a:t>
+            </a:r>
+            <a:br>
+              <a:rPr lang="en-US" dirty="0"/>
+            </a:br>
+            <a:r>
+              <a:rPr lang="en-US" dirty="0"/>
+              <a:t>created in step #4 of exercise.</a:t>
             </a:r>
           </a:p>
         </p:txBody>
@@ -4670,13 +4608,7 @@
               <a:rPr lang="en-US" sz="1600" i="1" dirty="0">
                 <a:latin typeface="Abadi Extra Light" panose="020B0604020202020204" pitchFamily="34" charset="0"/>
               </a:rPr>
-              <a:t>Use Google Street View to examine one of the hotspot corridors or intersections identified in your map. What do you observe about the street design in this area? What challenges does the current design create for pedestrian safety? What interventions, such as narrower travel lanes, raised crosswalks, protected bike lanes or shorter crossing distances, would you recommend for this </a:t>
-            </a:r>
-            <a:r>
-              <a:rPr lang="en-US" sz="1600" i="1">
-                <a:latin typeface="Abadi Extra Light" panose="020B0604020202020204" pitchFamily="34" charset="0"/>
-              </a:rPr>
-              <a:t>location?</a:t>
+              <a:t>Use Google Street View to examine one of the hotspot corridors or intersections identified in your map. What do you observe about the street design in this area? What challenges does the current design create for pedestrian safety? What interventions, such as narrower travel lanes, raised crosswalks, protected bike lanes or shorter crossing distances, would you recommend for this location?</a:t>
             </a:r>
             <a:endParaRPr lang="en-US" sz="1600" i="1" cap="none" dirty="0">
               <a:latin typeface="Abadi Extra Light" panose="020B0604020202020204" pitchFamily="34" charset="0"/>
@@ -4728,7 +4660,7 @@
             <a:pPr algn="ctr"/>
             <a:r>
               <a:rPr lang="en-US" dirty="0"/>
-              <a:t>Insert map or image copied from Google Streetview</a:t>
+              <a:t>Insert map or image copied from online map or Google Streetview showing selected intersection and/or corridor</a:t>
             </a:r>
           </a:p>
         </p:txBody>

--- a/2027/GEO330_Fall_Quarter/exercises/Exercise_01/scripts/slides/Exercise01_Template.pptx
+++ b/2027/GEO330_Fall_Quarter/exercises/Exercise_01/scripts/slides/Exercise01_Template.pptx
@@ -116,31 +116,23 @@
 </p:presentation>
 </file>
 
-<file path=ppt/revisionInfo.xml><?xml version="1.0" encoding="utf-8"?>
-<p1510:revInfo xmlns:a="http://schemas.openxmlformats.org/drawingml/2006/main" xmlns:r="http://schemas.openxmlformats.org/officeDocument/2006/relationships" xmlns:p1510="http://schemas.microsoft.com/office/powerpoint/2015/10/main">
-  <p1510:revLst>
-    <p1510:client id="{CDA1F6B1-B43D-4F92-8722-D0598E1F7E95}" v="17" dt="2026-09-11T20:24:23.057"/>
-  </p1510:revLst>
-</p1510:revInfo>
-</file>
-
 <file path=ppt/changesInfos/changesInfo1.xml><?xml version="1.0" encoding="utf-8"?>
 <pc:chgInfo xmlns:a="http://schemas.openxmlformats.org/drawingml/2006/main" xmlns:r="http://schemas.openxmlformats.org/officeDocument/2006/relationships" xmlns:ac="http://schemas.microsoft.com/office/drawing/2013/main/command" xmlns:pc="http://schemas.microsoft.com/office/powerpoint/2013/main/command">
   <pc:docChgLst>
     <pc:chgData name="Christopher Smith" userId="f635bcaf-d701-437b-bffd-1a8f160c01d9" providerId="ADAL" clId="{321CF1EA-DDCA-4C73-9872-605BFFD8AB88}"/>
     <pc:docChg chg="undo custSel addSld delSld modSld">
-      <pc:chgData name="Christopher Smith" userId="f635bcaf-d701-437b-bffd-1a8f160c01d9" providerId="ADAL" clId="{321CF1EA-DDCA-4C73-9872-605BFFD8AB88}" dt="2026-09-11T20:44:36.029" v="1617" actId="1076"/>
+      <pc:chgData name="Christopher Smith" userId="f635bcaf-d701-437b-bffd-1a8f160c01d9" providerId="ADAL" clId="{321CF1EA-DDCA-4C73-9872-605BFFD8AB88}" dt="2026-09-13T23:14:24.923" v="1620" actId="478"/>
       <pc:docMkLst>
         <pc:docMk/>
       </pc:docMkLst>
       <pc:sldChg chg="addSp delSp modSp mod">
-        <pc:chgData name="Christopher Smith" userId="f635bcaf-d701-437b-bffd-1a8f160c01d9" providerId="ADAL" clId="{321CF1EA-DDCA-4C73-9872-605BFFD8AB88}" dt="2026-09-11T20:44:36.029" v="1617" actId="1076"/>
+        <pc:chgData name="Christopher Smith" userId="f635bcaf-d701-437b-bffd-1a8f160c01d9" providerId="ADAL" clId="{321CF1EA-DDCA-4C73-9872-605BFFD8AB88}" dt="2026-09-13T23:14:24.923" v="1620" actId="478"/>
         <pc:sldMkLst>
           <pc:docMk/>
           <pc:sldMk cId="3196567083" sldId="258"/>
         </pc:sldMkLst>
-        <pc:spChg chg="del mod">
-          <ac:chgData name="Christopher Smith" userId="f635bcaf-d701-437b-bffd-1a8f160c01d9" providerId="ADAL" clId="{321CF1EA-DDCA-4C73-9872-605BFFD8AB88}" dt="2026-09-11T20:44:31.226" v="1615" actId="478"/>
+        <pc:spChg chg="add del mod">
+          <ac:chgData name="Christopher Smith" userId="f635bcaf-d701-437b-bffd-1a8f160c01d9" providerId="ADAL" clId="{321CF1EA-DDCA-4C73-9872-605BFFD8AB88}" dt="2026-09-13T23:14:24.923" v="1620" actId="478"/>
           <ac:spMkLst>
             <pc:docMk/>
             <pc:sldMk cId="3196567083" sldId="258"/>
@@ -163,8 +155,8 @@
             <ac:spMk id="11" creationId="{3E48FC44-1FA2-4F7A-0A80-59B4E81301D5}"/>
           </ac:spMkLst>
         </pc:spChg>
-        <pc:picChg chg="add mod">
-          <ac:chgData name="Christopher Smith" userId="f635bcaf-d701-437b-bffd-1a8f160c01d9" providerId="ADAL" clId="{321CF1EA-DDCA-4C73-9872-605BFFD8AB88}" dt="2026-09-11T20:44:36.029" v="1617" actId="1076"/>
+        <pc:picChg chg="add del mod">
+          <ac:chgData name="Christopher Smith" userId="f635bcaf-d701-437b-bffd-1a8f160c01d9" providerId="ADAL" clId="{321CF1EA-DDCA-4C73-9872-605BFFD8AB88}" dt="2026-09-13T23:14:24.443" v="1619" actId="22"/>
           <ac:picMkLst>
             <pc:docMk/>
             <pc:sldMk cId="3196567083" sldId="258"/>
@@ -303,13 +295,6 @@
             <ac:spMk id="6" creationId="{2A0E8101-6FD3-9312-509E-3ACCFF9CD6B5}"/>
           </ac:spMkLst>
         </pc:spChg>
-      </pc:sldChg>
-      <pc:sldChg chg="add del">
-        <pc:chgData name="Christopher Smith" userId="f635bcaf-d701-437b-bffd-1a8f160c01d9" providerId="ADAL" clId="{321CF1EA-DDCA-4C73-9872-605BFFD8AB88}" dt="2026-09-11T20:24:23.045" v="1614"/>
-        <pc:sldMkLst>
-          <pc:docMk/>
-          <pc:sldMk cId="2226035184" sldId="277"/>
-        </pc:sldMkLst>
       </pc:sldChg>
     </pc:docChg>
   </pc:docChgLst>
@@ -3774,36 +3759,62 @@
           </a:p>
         </p:txBody>
       </p:sp>
-      <p:pic>
-        <p:nvPicPr>
-          <p:cNvPr id="4" name="Picture 3">
-            <a:extLst>
-              <a:ext uri="{FF2B5EF4-FFF2-40B4-BE49-F238E27FC236}">
-                <a16:creationId xmlns:a16="http://schemas.microsoft.com/office/drawing/2014/main" id="{A8A6836B-219D-B065-2232-9334EDFB143A}"/>
-              </a:ext>
-            </a:extLst>
-          </p:cNvPr>
-          <p:cNvPicPr>
-            <a:picLocks noChangeAspect="1"/>
-          </p:cNvPicPr>
+      <p:sp>
+        <p:nvSpPr>
+          <p:cNvPr id="3" name="Rectangle: Rounded Corners 2">
+            <a:extLst>
+              <a:ext uri="{FF2B5EF4-FFF2-40B4-BE49-F238E27FC236}">
+                <a16:creationId xmlns:a16="http://schemas.microsoft.com/office/drawing/2014/main" id="{ED507706-6F42-E11B-D908-0EABC71B74DF}"/>
+              </a:ext>
+            </a:extLst>
+          </p:cNvPr>
+          <p:cNvSpPr/>
           <p:nvPr/>
-        </p:nvPicPr>
-        <p:blipFill>
-          <a:blip r:embed="rId2"/>
-          <a:stretch>
-            <a:fillRect/>
-          </a:stretch>
-        </p:blipFill>
+        </p:nvSpPr>
         <p:spPr>
           <a:xfrm>
-            <a:off x="7058553" y="781050"/>
-            <a:ext cx="4210050" cy="5295900"/>
+            <a:off x="6735536" y="1698171"/>
+            <a:ext cx="4302578" cy="3788229"/>
           </a:xfrm>
-          <a:prstGeom prst="rect">
+          <a:prstGeom prst="roundRect">
             <a:avLst/>
           </a:prstGeom>
         </p:spPr>
-      </p:pic>
+        <p:style>
+          <a:lnRef idx="2">
+            <a:schemeClr val="accent1">
+              <a:shade val="15000"/>
+            </a:schemeClr>
+          </a:lnRef>
+          <a:fillRef idx="1">
+            <a:schemeClr val="accent1"/>
+          </a:fillRef>
+          <a:effectRef idx="0">
+            <a:schemeClr val="accent1"/>
+          </a:effectRef>
+          <a:fontRef idx="minor">
+            <a:schemeClr val="lt1"/>
+          </a:fontRef>
+        </p:style>
+        <p:txBody>
+          <a:bodyPr rtlCol="0" anchor="ctr"/>
+          <a:lstStyle/>
+          <a:p>
+            <a:pPr algn="ctr"/>
+            <a:r>
+              <a:rPr lang="en-US" dirty="0"/>
+              <a:t>Insert national mode share trends plot</a:t>
+            </a:r>
+            <a:br>
+              <a:rPr lang="en-US" dirty="0"/>
+            </a:br>
+            <a:r>
+              <a:rPr lang="en-US" dirty="0"/>
+              <a:t>available in step #3 of exercise.</a:t>
+            </a:r>
+          </a:p>
+        </p:txBody>
+      </p:sp>
     </p:spTree>
     <p:extLst>
       <p:ext uri="{BB962C8B-B14F-4D97-AF65-F5344CB8AC3E}">

--- a/2027/GEO330_Fall_Quarter/exercises/Exercise_01/scripts/slides/Exercise01_Template.pptx
+++ b/2027/GEO330_Fall_Quarter/exercises/Exercise_01/scripts/slides/Exercise01_Template.pptx
@@ -3815,6 +3815,60 @@
           </a:p>
         </p:txBody>
       </p:sp>
+      <p:sp>
+        <p:nvSpPr>
+          <p:cNvPr id="20" name="Footer Placeholder 19"/>
+          <p:cNvSpPr>
+            <a:spLocks noGrp="1"/>
+          </p:cNvSpPr>
+          <p:nvPr>
+            <p:ph type="ftr" sz="quarter" idx="11"/>
+          </p:nvPr>
+        </p:nvSpPr>
+        <p:spPr>
+          <a:xfrm>
+            <a:off x="715383" y="6230000"/>
+            <a:ext cx="10095603" cy="365125"/>
+          </a:xfrm>
+        </p:spPr>
+        <p:txBody>
+          <a:bodyPr/>
+          <a:lstStyle/>
+          <a:p>
+            <a:r>
+              <a:rPr lang="en-US" sz="1050" dirty="0"/>
+              <a:t>Sustainable Urban Transportation Exercise #1  |  Autumn 2026  |  DePaul University  |  C. Scott Smith, PhD AICP</a:t>
+            </a:r>
+          </a:p>
+        </p:txBody>
+      </p:sp>
+      <p:sp>
+        <p:nvSpPr>
+          <p:cNvPr id="21" name="Slide Number Placeholder 20"/>
+          <p:cNvSpPr>
+            <a:spLocks noGrp="1"/>
+          </p:cNvSpPr>
+          <p:nvPr>
+            <p:ph type="sldNum" sz="quarter" idx="12"/>
+          </p:nvPr>
+        </p:nvSpPr>
+        <p:spPr>
+          <a:xfrm>
+            <a:off x="10810986" y="6230000"/>
+            <a:ext cx="672354" cy="365125"/>
+          </a:xfrm>
+        </p:spPr>
+        <p:txBody>
+          <a:bodyPr/>
+          <a:lstStyle/>
+          <a:p>
+            <a:fld id="{C3DB2ADC-AF19-4574-8C10-79B5B04FCA27}" type="slidenum">
+              <a:rPr lang="en-US" sz="1050"/>
+              <a:t>‹#›</a:t>
+            </a:fld>
+          </a:p>
+        </p:txBody>
+      </p:sp>
     </p:spTree>
     <p:extLst>
       <p:ext uri="{BB962C8B-B14F-4D97-AF65-F5344CB8AC3E}">
@@ -4062,6 +4116,60 @@
           </a:p>
         </p:txBody>
       </p:sp>
+      <p:sp>
+        <p:nvSpPr>
+          <p:cNvPr id="20" name="Footer Placeholder 19"/>
+          <p:cNvSpPr>
+            <a:spLocks noGrp="1"/>
+          </p:cNvSpPr>
+          <p:nvPr>
+            <p:ph type="ftr" sz="quarter" idx="11"/>
+          </p:nvPr>
+        </p:nvSpPr>
+        <p:spPr>
+          <a:xfrm>
+            <a:off x="715383" y="6230000"/>
+            <a:ext cx="10095603" cy="365125"/>
+          </a:xfrm>
+        </p:spPr>
+        <p:txBody>
+          <a:bodyPr/>
+          <a:lstStyle/>
+          <a:p>
+            <a:r>
+              <a:rPr lang="en-US" sz="1050" dirty="0"/>
+              <a:t>Sustainable Urban Transportation Exercise #1  |  Autumn 2026  |  DePaul University  |  C. Scott Smith, PhD AICP</a:t>
+            </a:r>
+          </a:p>
+        </p:txBody>
+      </p:sp>
+      <p:sp>
+        <p:nvSpPr>
+          <p:cNvPr id="21" name="Slide Number Placeholder 20"/>
+          <p:cNvSpPr>
+            <a:spLocks noGrp="1"/>
+          </p:cNvSpPr>
+          <p:nvPr>
+            <p:ph type="sldNum" sz="quarter" idx="12"/>
+          </p:nvPr>
+        </p:nvSpPr>
+        <p:spPr>
+          <a:xfrm>
+            <a:off x="10810986" y="6230000"/>
+            <a:ext cx="672354" cy="365125"/>
+          </a:xfrm>
+        </p:spPr>
+        <p:txBody>
+          <a:bodyPr/>
+          <a:lstStyle/>
+          <a:p>
+            <a:fld id="{C3DB2ADC-AF19-4574-8C10-79B5B04FCA27}" type="slidenum">
+              <a:rPr lang="en-US" sz="1050"/>
+              <a:t>‹#›</a:t>
+            </a:fld>
+          </a:p>
+        </p:txBody>
+      </p:sp>
     </p:spTree>
     <p:extLst>
       <p:ext uri="{BB962C8B-B14F-4D97-AF65-F5344CB8AC3E}">
@@ -4285,6 +4393,60 @@
           </a:p>
         </p:txBody>
       </p:sp>
+      <p:sp>
+        <p:nvSpPr>
+          <p:cNvPr id="20" name="Footer Placeholder 19"/>
+          <p:cNvSpPr>
+            <a:spLocks noGrp="1"/>
+          </p:cNvSpPr>
+          <p:nvPr>
+            <p:ph type="ftr" sz="quarter" idx="11"/>
+          </p:nvPr>
+        </p:nvSpPr>
+        <p:spPr>
+          <a:xfrm>
+            <a:off x="715383" y="6230000"/>
+            <a:ext cx="10095603" cy="365125"/>
+          </a:xfrm>
+        </p:spPr>
+        <p:txBody>
+          <a:bodyPr/>
+          <a:lstStyle/>
+          <a:p>
+            <a:r>
+              <a:rPr lang="en-US" sz="1050" dirty="0"/>
+              <a:t>Sustainable Urban Transportation Exercise #1  |  Autumn 2026  |  DePaul University  |  C. Scott Smith, PhD AICP</a:t>
+            </a:r>
+          </a:p>
+        </p:txBody>
+      </p:sp>
+      <p:sp>
+        <p:nvSpPr>
+          <p:cNvPr id="21" name="Slide Number Placeholder 20"/>
+          <p:cNvSpPr>
+            <a:spLocks noGrp="1"/>
+          </p:cNvSpPr>
+          <p:nvPr>
+            <p:ph type="sldNum" sz="quarter" idx="12"/>
+          </p:nvPr>
+        </p:nvSpPr>
+        <p:spPr>
+          <a:xfrm>
+            <a:off x="10810986" y="6230000"/>
+            <a:ext cx="672354" cy="365125"/>
+          </a:xfrm>
+        </p:spPr>
+        <p:txBody>
+          <a:bodyPr/>
+          <a:lstStyle/>
+          <a:p>
+            <a:fld id="{C3DB2ADC-AF19-4574-8C10-79B5B04FCA27}" type="slidenum">
+              <a:rPr lang="en-US" sz="1050"/>
+              <a:t>‹#›</a:t>
+            </a:fld>
+          </a:p>
+        </p:txBody>
+      </p:sp>
     </p:spTree>
     <p:extLst>
       <p:ext uri="{BB962C8B-B14F-4D97-AF65-F5344CB8AC3E}">
@@ -4511,6 +4673,60 @@
           </a:p>
         </p:txBody>
       </p:sp>
+      <p:sp>
+        <p:nvSpPr>
+          <p:cNvPr id="20" name="Footer Placeholder 19"/>
+          <p:cNvSpPr>
+            <a:spLocks noGrp="1"/>
+          </p:cNvSpPr>
+          <p:nvPr>
+            <p:ph type="ftr" sz="quarter" idx="11"/>
+          </p:nvPr>
+        </p:nvSpPr>
+        <p:spPr>
+          <a:xfrm>
+            <a:off x="715383" y="6230000"/>
+            <a:ext cx="10095603" cy="365125"/>
+          </a:xfrm>
+        </p:spPr>
+        <p:txBody>
+          <a:bodyPr/>
+          <a:lstStyle/>
+          <a:p>
+            <a:r>
+              <a:rPr lang="en-US" sz="1050" dirty="0"/>
+              <a:t>Sustainable Urban Transportation Exercise #1  |  Autumn 2026  |  DePaul University  |  C. Scott Smith, PhD AICP</a:t>
+            </a:r>
+          </a:p>
+        </p:txBody>
+      </p:sp>
+      <p:sp>
+        <p:nvSpPr>
+          <p:cNvPr id="21" name="Slide Number Placeholder 20"/>
+          <p:cNvSpPr>
+            <a:spLocks noGrp="1"/>
+          </p:cNvSpPr>
+          <p:nvPr>
+            <p:ph type="sldNum" sz="quarter" idx="12"/>
+          </p:nvPr>
+        </p:nvSpPr>
+        <p:spPr>
+          <a:xfrm>
+            <a:off x="10810986" y="6230000"/>
+            <a:ext cx="672354" cy="365125"/>
+          </a:xfrm>
+        </p:spPr>
+        <p:txBody>
+          <a:bodyPr/>
+          <a:lstStyle/>
+          <a:p>
+            <a:fld id="{C3DB2ADC-AF19-4574-8C10-79B5B04FCA27}" type="slidenum">
+              <a:rPr lang="en-US" sz="1050"/>
+              <a:t>‹#›</a:t>
+            </a:fld>
+          </a:p>
+        </p:txBody>
+      </p:sp>
     </p:spTree>
     <p:extLst>
       <p:ext uri="{BB962C8B-B14F-4D97-AF65-F5344CB8AC3E}">
@@ -4673,6 +4889,60 @@
               <a:rPr lang="en-US" dirty="0"/>
               <a:t>Insert map or image copied from online map or Google Streetview showing selected intersection and/or corridor</a:t>
             </a:r>
+          </a:p>
+        </p:txBody>
+      </p:sp>
+      <p:sp>
+        <p:nvSpPr>
+          <p:cNvPr id="20" name="Footer Placeholder 19"/>
+          <p:cNvSpPr>
+            <a:spLocks noGrp="1"/>
+          </p:cNvSpPr>
+          <p:nvPr>
+            <p:ph type="ftr" sz="quarter" idx="11"/>
+          </p:nvPr>
+        </p:nvSpPr>
+        <p:spPr>
+          <a:xfrm>
+            <a:off x="715383" y="6230000"/>
+            <a:ext cx="10095603" cy="365125"/>
+          </a:xfrm>
+        </p:spPr>
+        <p:txBody>
+          <a:bodyPr/>
+          <a:lstStyle/>
+          <a:p>
+            <a:r>
+              <a:rPr lang="en-US" sz="1050" dirty="0"/>
+              <a:t>Sustainable Urban Transportation Exercise #1  |  Autumn 2026  |  DePaul University  |  C. Scott Smith, PhD AICP</a:t>
+            </a:r>
+          </a:p>
+        </p:txBody>
+      </p:sp>
+      <p:sp>
+        <p:nvSpPr>
+          <p:cNvPr id="21" name="Slide Number Placeholder 20"/>
+          <p:cNvSpPr>
+            <a:spLocks noGrp="1"/>
+          </p:cNvSpPr>
+          <p:nvPr>
+            <p:ph type="sldNum" sz="quarter" idx="12"/>
+          </p:nvPr>
+        </p:nvSpPr>
+        <p:spPr>
+          <a:xfrm>
+            <a:off x="10810986" y="6230000"/>
+            <a:ext cx="672354" cy="365125"/>
+          </a:xfrm>
+        </p:spPr>
+        <p:txBody>
+          <a:bodyPr/>
+          <a:lstStyle/>
+          <a:p>
+            <a:fld id="{C3DB2ADC-AF19-4574-8C10-79B5B04FCA27}" type="slidenum">
+              <a:rPr lang="en-US" sz="1050"/>
+              <a:t>‹#›</a:t>
+            </a:fld>
           </a:p>
         </p:txBody>
       </p:sp>
